--- a/ゲーム科3年/00_前期/オンラインゲームプログラミングⅠ/12_APIとHandler.pptx
+++ b/ゲーム科3年/00_前期/オンラインゲームプログラミングⅠ/12_APIとHandler.pptx
@@ -9,6 +9,11 @@
     <p:sldId id="257" r:id="rId3"/>
     <p:sldId id="258" r:id="rId4"/>
     <p:sldId id="259" r:id="rId5"/>
+    <p:sldId id="260" r:id="rId6"/>
+    <p:sldId id="261" r:id="rId7"/>
+    <p:sldId id="262" r:id="rId8"/>
+    <p:sldId id="263" r:id="rId9"/>
+    <p:sldId id="264" r:id="rId10"/>
   </p:sldIdLst>
   <p:sldSz cx="12192000" cy="6858000"/>
   <p:notesSz cx="6858000" cy="9144000"/>
@@ -262,7 +267,7 @@
           <a:p>
             <a:fld id="{E9CC885B-4903-4D54-9A93-00025F12DED9}" type="datetimeFigureOut">
               <a:rPr kumimoji="1" lang="ja-JP" altLang="en-US" smtClean="0"/>
-              <a:t>2026/1/16</a:t>
+              <a:t>2026/1/19</a:t>
             </a:fld>
             <a:endParaRPr kumimoji="1" lang="ja-JP" altLang="en-US"/>
           </a:p>
@@ -492,7 +497,7 @@
           <a:p>
             <a:fld id="{E9CC885B-4903-4D54-9A93-00025F12DED9}" type="datetimeFigureOut">
               <a:rPr kumimoji="1" lang="ja-JP" altLang="en-US" smtClean="0"/>
-              <a:t>2026/1/16</a:t>
+              <a:t>2026/1/19</a:t>
             </a:fld>
             <a:endParaRPr kumimoji="1" lang="ja-JP" altLang="en-US"/>
           </a:p>
@@ -732,7 +737,7 @@
           <a:p>
             <a:fld id="{E9CC885B-4903-4D54-9A93-00025F12DED9}" type="datetimeFigureOut">
               <a:rPr kumimoji="1" lang="ja-JP" altLang="en-US" smtClean="0"/>
-              <a:t>2026/1/16</a:t>
+              <a:t>2026/1/19</a:t>
             </a:fld>
             <a:endParaRPr kumimoji="1" lang="ja-JP" altLang="en-US"/>
           </a:p>
@@ -962,7 +967,7 @@
           <a:p>
             <a:fld id="{E9CC885B-4903-4D54-9A93-00025F12DED9}" type="datetimeFigureOut">
               <a:rPr kumimoji="1" lang="ja-JP" altLang="en-US" smtClean="0"/>
-              <a:t>2026/1/16</a:t>
+              <a:t>2026/1/19</a:t>
             </a:fld>
             <a:endParaRPr kumimoji="1" lang="ja-JP" altLang="en-US"/>
           </a:p>
@@ -1237,7 +1242,7 @@
           <a:p>
             <a:fld id="{E9CC885B-4903-4D54-9A93-00025F12DED9}" type="datetimeFigureOut">
               <a:rPr kumimoji="1" lang="ja-JP" altLang="en-US" smtClean="0"/>
-              <a:t>2026/1/16</a:t>
+              <a:t>2026/1/19</a:t>
             </a:fld>
             <a:endParaRPr kumimoji="1" lang="ja-JP" altLang="en-US"/>
           </a:p>
@@ -1566,7 +1571,7 @@
           <a:p>
             <a:fld id="{E9CC885B-4903-4D54-9A93-00025F12DED9}" type="datetimeFigureOut">
               <a:rPr kumimoji="1" lang="ja-JP" altLang="en-US" smtClean="0"/>
-              <a:t>2026/1/16</a:t>
+              <a:t>2026/1/19</a:t>
             </a:fld>
             <a:endParaRPr kumimoji="1" lang="ja-JP" altLang="en-US"/>
           </a:p>
@@ -2042,7 +2047,7 @@
           <a:p>
             <a:fld id="{E9CC885B-4903-4D54-9A93-00025F12DED9}" type="datetimeFigureOut">
               <a:rPr kumimoji="1" lang="ja-JP" altLang="en-US" smtClean="0"/>
-              <a:t>2026/1/16</a:t>
+              <a:t>2026/1/19</a:t>
             </a:fld>
             <a:endParaRPr kumimoji="1" lang="ja-JP" altLang="en-US"/>
           </a:p>
@@ -2183,7 +2188,7 @@
           <a:p>
             <a:fld id="{E9CC885B-4903-4D54-9A93-00025F12DED9}" type="datetimeFigureOut">
               <a:rPr kumimoji="1" lang="ja-JP" altLang="en-US" smtClean="0"/>
-              <a:t>2026/1/16</a:t>
+              <a:t>2026/1/19</a:t>
             </a:fld>
             <a:endParaRPr kumimoji="1" lang="ja-JP" altLang="en-US"/>
           </a:p>
@@ -2296,7 +2301,7 @@
           <a:p>
             <a:fld id="{E9CC885B-4903-4D54-9A93-00025F12DED9}" type="datetimeFigureOut">
               <a:rPr kumimoji="1" lang="ja-JP" altLang="en-US" smtClean="0"/>
-              <a:t>2026/1/16</a:t>
+              <a:t>2026/1/19</a:t>
             </a:fld>
             <a:endParaRPr kumimoji="1" lang="ja-JP" altLang="en-US"/>
           </a:p>
@@ -2639,7 +2644,7 @@
           <a:p>
             <a:fld id="{E9CC885B-4903-4D54-9A93-00025F12DED9}" type="datetimeFigureOut">
               <a:rPr kumimoji="1" lang="ja-JP" altLang="en-US" smtClean="0"/>
-              <a:t>2026/1/16</a:t>
+              <a:t>2026/1/19</a:t>
             </a:fld>
             <a:endParaRPr kumimoji="1" lang="ja-JP" altLang="en-US"/>
           </a:p>
@@ -2927,7 +2932,7 @@
           <a:p>
             <a:fld id="{E9CC885B-4903-4D54-9A93-00025F12DED9}" type="datetimeFigureOut">
               <a:rPr kumimoji="1" lang="ja-JP" altLang="en-US" smtClean="0"/>
-              <a:t>2026/1/16</a:t>
+              <a:t>2026/1/19</a:t>
             </a:fld>
             <a:endParaRPr kumimoji="1" lang="ja-JP" altLang="en-US"/>
           </a:p>
@@ -3200,7 +3205,7 @@
           <a:p>
             <a:fld id="{E9CC885B-4903-4D54-9A93-00025F12DED9}" type="datetimeFigureOut">
               <a:rPr kumimoji="1" lang="ja-JP" altLang="en-US" smtClean="0"/>
-              <a:t>2026/1/16</a:t>
+              <a:t>2026/1/19</a:t>
             </a:fld>
             <a:endParaRPr kumimoji="1" lang="ja-JP" altLang="en-US"/>
           </a:p>
@@ -3822,7 +3827,7 @@
         <p:spPr>
           <a:xfrm>
             <a:off x="567542" y="1216429"/>
-            <a:ext cx="10206640" cy="4524315"/>
+            <a:ext cx="11572399" cy="4524315"/>
           </a:xfrm>
           <a:prstGeom prst="rect">
             <a:avLst/>
@@ -3943,8 +3948,16 @@
           </a:p>
           <a:p>
             <a:r>
+              <a:rPr lang="ja-JP" altLang="en-US" sz="2400" b="1" dirty="0">
+                <a:solidFill>
+                  <a:srgbClr val="FF0000"/>
+                </a:solidFill>
+              </a:rPr>
+              <a:t>サーバーに問い合わせ（リクエスト）</a:t>
+            </a:r>
+            <a:r>
               <a:rPr lang="ja-JP" altLang="en-US" sz="2400" dirty="0"/>
-              <a:t>サーバーに問い合わせをするや、その返答の処理をまとめて書く。</a:t>
+              <a:t>をしたり、その返答の処理をまとめて書く。</a:t>
             </a:r>
             <a:endParaRPr lang="en-US" altLang="ja-JP" sz="2400" dirty="0"/>
           </a:p>
@@ -4374,6 +4387,1095 @@
     <p:extLst>
       <p:ext uri="{BB962C8B-B14F-4D97-AF65-F5344CB8AC3E}">
         <p14:creationId xmlns:p14="http://schemas.microsoft.com/office/powerpoint/2010/main" val="1786120464"/>
+      </p:ext>
+    </p:extLst>
+  </p:cSld>
+  <p:clrMapOvr>
+    <a:masterClrMapping/>
+  </p:clrMapOvr>
+</p:sld>
+</file>
+
+<file path=ppt/slides/slide5.xml><?xml version="1.0" encoding="utf-8"?>
+<p:sld xmlns:a="http://schemas.openxmlformats.org/drawingml/2006/main" xmlns:r="http://schemas.openxmlformats.org/officeDocument/2006/relationships" xmlns:p="http://schemas.openxmlformats.org/presentationml/2006/main">
+  <p:cSld>
+    <p:spTree>
+      <p:nvGrpSpPr>
+        <p:cNvPr id="1" name=""/>
+        <p:cNvGrpSpPr/>
+        <p:nvPr/>
+      </p:nvGrpSpPr>
+      <p:grpSpPr>
+        <a:xfrm>
+          <a:off x="0" y="0"/>
+          <a:ext cx="0" cy="0"/>
+          <a:chOff x="0" y="0"/>
+          <a:chExt cx="0" cy="0"/>
+        </a:xfrm>
+      </p:grpSpPr>
+      <p:sp>
+        <p:nvSpPr>
+          <p:cNvPr id="4" name="テキスト ボックス 3">
+            <a:extLst>
+              <a:ext uri="{FF2B5EF4-FFF2-40B4-BE49-F238E27FC236}">
+                <a16:creationId xmlns:a16="http://schemas.microsoft.com/office/drawing/2014/main" id="{5A13BF46-B8C5-48AA-8308-C9ECFF431A18}"/>
+              </a:ext>
+            </a:extLst>
+          </p:cNvPr>
+          <p:cNvSpPr txBox="1"/>
+          <p:nvPr/>
+        </p:nvSpPr>
+        <p:spPr>
+          <a:xfrm>
+            <a:off x="567542" y="491954"/>
+            <a:ext cx="2876108" cy="584775"/>
+          </a:xfrm>
+          <a:prstGeom prst="rect">
+            <a:avLst/>
+          </a:prstGeom>
+          <a:noFill/>
+        </p:spPr>
+        <p:txBody>
+          <a:bodyPr wrap="none" rtlCol="0">
+            <a:spAutoFit/>
+          </a:bodyPr>
+          <a:lstStyle/>
+          <a:p>
+            <a:r>
+              <a:rPr kumimoji="1" lang="en-US" altLang="ja-JP" sz="3200" b="1" u="sng" dirty="0"/>
+              <a:t>API</a:t>
+            </a:r>
+            <a:r>
+              <a:rPr kumimoji="1" lang="ja-JP" altLang="en-US" sz="3200" b="1" u="sng" dirty="0"/>
+              <a:t>と</a:t>
+            </a:r>
+            <a:r>
+              <a:rPr kumimoji="1" lang="en-US" altLang="ja-JP" sz="3200" b="1" u="sng" dirty="0"/>
+              <a:t>Handler</a:t>
+            </a:r>
+            <a:endParaRPr kumimoji="1" lang="ja-JP" altLang="en-US" sz="3200" b="1" u="sng" dirty="0"/>
+          </a:p>
+        </p:txBody>
+      </p:sp>
+      <p:sp>
+        <p:nvSpPr>
+          <p:cNvPr id="6" name="テキスト ボックス 5">
+            <a:extLst>
+              <a:ext uri="{FF2B5EF4-FFF2-40B4-BE49-F238E27FC236}">
+                <a16:creationId xmlns:a16="http://schemas.microsoft.com/office/drawing/2014/main" id="{55830AD6-028B-4C4E-80BF-B70DFC1C3A46}"/>
+              </a:ext>
+            </a:extLst>
+          </p:cNvPr>
+          <p:cNvSpPr txBox="1"/>
+          <p:nvPr/>
+        </p:nvSpPr>
+        <p:spPr>
+          <a:xfrm>
+            <a:off x="567542" y="1216429"/>
+            <a:ext cx="6647974" cy="461665"/>
+          </a:xfrm>
+          <a:prstGeom prst="rect">
+            <a:avLst/>
+          </a:prstGeom>
+          <a:noFill/>
+        </p:spPr>
+        <p:txBody>
+          <a:bodyPr wrap="none" rtlCol="0">
+            <a:spAutoFit/>
+          </a:bodyPr>
+          <a:lstStyle/>
+          <a:p>
+            <a:r>
+              <a:rPr lang="ja-JP" altLang="en-US" sz="2400" dirty="0"/>
+              <a:t>実際に使われているところを見てみましょう。</a:t>
+            </a:r>
+            <a:endParaRPr lang="en-US" altLang="ja-JP" sz="2400" dirty="0"/>
+          </a:p>
+        </p:txBody>
+      </p:sp>
+      <p:pic>
+        <p:nvPicPr>
+          <p:cNvPr id="3" name="図 2">
+            <a:extLst>
+              <a:ext uri="{FF2B5EF4-FFF2-40B4-BE49-F238E27FC236}">
+                <a16:creationId xmlns:a16="http://schemas.microsoft.com/office/drawing/2014/main" id="{BF4BF9FA-0536-477B-96BF-5924FE112EF7}"/>
+              </a:ext>
+            </a:extLst>
+          </p:cNvPr>
+          <p:cNvPicPr>
+            <a:picLocks noChangeAspect="1"/>
+          </p:cNvPicPr>
+          <p:nvPr/>
+        </p:nvPicPr>
+        <p:blipFill>
+          <a:blip r:embed="rId2"/>
+          <a:stretch>
+            <a:fillRect/>
+          </a:stretch>
+        </p:blipFill>
+        <p:spPr>
+          <a:xfrm>
+            <a:off x="567542" y="2245144"/>
+            <a:ext cx="6973273" cy="1571844"/>
+          </a:xfrm>
+          <a:prstGeom prst="rect">
+            <a:avLst/>
+          </a:prstGeom>
+        </p:spPr>
+      </p:pic>
+      <p:sp>
+        <p:nvSpPr>
+          <p:cNvPr id="8" name="テキスト ボックス 7">
+            <a:extLst>
+              <a:ext uri="{FF2B5EF4-FFF2-40B4-BE49-F238E27FC236}">
+                <a16:creationId xmlns:a16="http://schemas.microsoft.com/office/drawing/2014/main" id="{EBA267B9-F483-4272-9F5F-D1D39B2DD15D}"/>
+              </a:ext>
+            </a:extLst>
+          </p:cNvPr>
+          <p:cNvSpPr txBox="1"/>
+          <p:nvPr/>
+        </p:nvSpPr>
+        <p:spPr>
+          <a:xfrm>
+            <a:off x="567542" y="1906590"/>
+            <a:ext cx="2087431" cy="338554"/>
+          </a:xfrm>
+          <a:prstGeom prst="rect">
+            <a:avLst/>
+          </a:prstGeom>
+          <a:noFill/>
+        </p:spPr>
+        <p:txBody>
+          <a:bodyPr wrap="none" rtlCol="0">
+            <a:spAutoFit/>
+          </a:bodyPr>
+          <a:lstStyle/>
+          <a:p>
+            <a:r>
+              <a:rPr lang="en-US" altLang="ja-JP" sz="1600" b="1" dirty="0">
+                <a:solidFill>
+                  <a:srgbClr val="FF0000"/>
+                </a:solidFill>
+              </a:rPr>
+              <a:t>NetworkPlayer.cpp</a:t>
+            </a:r>
+          </a:p>
+        </p:txBody>
+      </p:sp>
+      <p:sp>
+        <p:nvSpPr>
+          <p:cNvPr id="9" name="正方形/長方形 8">
+            <a:extLst>
+              <a:ext uri="{FF2B5EF4-FFF2-40B4-BE49-F238E27FC236}">
+                <a16:creationId xmlns:a16="http://schemas.microsoft.com/office/drawing/2014/main" id="{A7D0B48D-98C2-4AC3-96B7-DC5ED881587E}"/>
+              </a:ext>
+            </a:extLst>
+          </p:cNvPr>
+          <p:cNvSpPr/>
+          <p:nvPr/>
+        </p:nvSpPr>
+        <p:spPr>
+          <a:xfrm>
+            <a:off x="2226734" y="2798232"/>
+            <a:ext cx="4988782" cy="499533"/>
+          </a:xfrm>
+          <a:prstGeom prst="rect">
+            <a:avLst/>
+          </a:prstGeom>
+          <a:noFill/>
+          <a:ln w="38100">
+            <a:solidFill>
+              <a:srgbClr val="FF0000"/>
+            </a:solidFill>
+          </a:ln>
+        </p:spPr>
+        <p:style>
+          <a:lnRef idx="2">
+            <a:schemeClr val="accent1">
+              <a:shade val="50000"/>
+            </a:schemeClr>
+          </a:lnRef>
+          <a:fillRef idx="1">
+            <a:schemeClr val="accent1"/>
+          </a:fillRef>
+          <a:effectRef idx="0">
+            <a:schemeClr val="accent1"/>
+          </a:effectRef>
+          <a:fontRef idx="minor">
+            <a:schemeClr val="lt1"/>
+          </a:fontRef>
+        </p:style>
+        <p:txBody>
+          <a:bodyPr rtlCol="0" anchor="ctr"/>
+          <a:lstStyle/>
+          <a:p>
+            <a:pPr algn="ctr"/>
+            <a:endParaRPr kumimoji="1" lang="ja-JP" altLang="en-US"/>
+          </a:p>
+        </p:txBody>
+      </p:sp>
+      <p:pic>
+        <p:nvPicPr>
+          <p:cNvPr id="11" name="図 10">
+            <a:extLst>
+              <a:ext uri="{FF2B5EF4-FFF2-40B4-BE49-F238E27FC236}">
+                <a16:creationId xmlns:a16="http://schemas.microsoft.com/office/drawing/2014/main" id="{0DF623F3-C39C-447A-B0A2-286F0A39C509}"/>
+              </a:ext>
+            </a:extLst>
+          </p:cNvPr>
+          <p:cNvPicPr>
+            <a:picLocks noChangeAspect="1"/>
+          </p:cNvPicPr>
+          <p:nvPr/>
+        </p:nvPicPr>
+        <p:blipFill>
+          <a:blip r:embed="rId3"/>
+          <a:stretch>
+            <a:fillRect/>
+          </a:stretch>
+        </p:blipFill>
+        <p:spPr>
+          <a:xfrm>
+            <a:off x="567542" y="4673441"/>
+            <a:ext cx="4801270" cy="1733792"/>
+          </a:xfrm>
+          <a:prstGeom prst="rect">
+            <a:avLst/>
+          </a:prstGeom>
+        </p:spPr>
+      </p:pic>
+      <p:sp>
+        <p:nvSpPr>
+          <p:cNvPr id="12" name="テキスト ボックス 11">
+            <a:extLst>
+              <a:ext uri="{FF2B5EF4-FFF2-40B4-BE49-F238E27FC236}">
+                <a16:creationId xmlns:a16="http://schemas.microsoft.com/office/drawing/2014/main" id="{CAF00ABD-C7DB-41F5-AC41-AE03D7F8A681}"/>
+              </a:ext>
+            </a:extLst>
+          </p:cNvPr>
+          <p:cNvSpPr txBox="1"/>
+          <p:nvPr/>
+        </p:nvSpPr>
+        <p:spPr>
+          <a:xfrm>
+            <a:off x="482875" y="4334887"/>
+            <a:ext cx="2502608" cy="338554"/>
+          </a:xfrm>
+          <a:prstGeom prst="rect">
+            <a:avLst/>
+          </a:prstGeom>
+          <a:noFill/>
+        </p:spPr>
+        <p:txBody>
+          <a:bodyPr wrap="none" rtlCol="0">
+            <a:spAutoFit/>
+          </a:bodyPr>
+          <a:lstStyle/>
+          <a:p>
+            <a:r>
+              <a:rPr lang="en-US" altLang="ja-JP" sz="1600" b="1" dirty="0">
+                <a:solidFill>
+                  <a:srgbClr val="FF0000"/>
+                </a:solidFill>
+              </a:rPr>
+              <a:t>NetworkPlayScene.cpp</a:t>
+            </a:r>
+          </a:p>
+        </p:txBody>
+      </p:sp>
+      <p:sp>
+        <p:nvSpPr>
+          <p:cNvPr id="13" name="正方形/長方形 12">
+            <a:extLst>
+              <a:ext uri="{FF2B5EF4-FFF2-40B4-BE49-F238E27FC236}">
+                <a16:creationId xmlns:a16="http://schemas.microsoft.com/office/drawing/2014/main" id="{BA12C992-B01E-4FBD-900E-AE99B820EC57}"/>
+              </a:ext>
+            </a:extLst>
+          </p:cNvPr>
+          <p:cNvSpPr/>
+          <p:nvPr/>
+        </p:nvSpPr>
+        <p:spPr>
+          <a:xfrm>
+            <a:off x="1905001" y="5023871"/>
+            <a:ext cx="2954866" cy="617700"/>
+          </a:xfrm>
+          <a:prstGeom prst="rect">
+            <a:avLst/>
+          </a:prstGeom>
+          <a:noFill/>
+          <a:ln w="38100">
+            <a:solidFill>
+              <a:srgbClr val="FF0000"/>
+            </a:solidFill>
+          </a:ln>
+        </p:spPr>
+        <p:style>
+          <a:lnRef idx="2">
+            <a:schemeClr val="accent1">
+              <a:shade val="50000"/>
+            </a:schemeClr>
+          </a:lnRef>
+          <a:fillRef idx="1">
+            <a:schemeClr val="accent1"/>
+          </a:fillRef>
+          <a:effectRef idx="0">
+            <a:schemeClr val="accent1"/>
+          </a:effectRef>
+          <a:fontRef idx="minor">
+            <a:schemeClr val="lt1"/>
+          </a:fontRef>
+        </p:style>
+        <p:txBody>
+          <a:bodyPr rtlCol="0" anchor="ctr"/>
+          <a:lstStyle/>
+          <a:p>
+            <a:pPr algn="ctr"/>
+            <a:endParaRPr kumimoji="1" lang="ja-JP" altLang="en-US"/>
+          </a:p>
+        </p:txBody>
+      </p:sp>
+    </p:spTree>
+    <p:extLst>
+      <p:ext uri="{BB962C8B-B14F-4D97-AF65-F5344CB8AC3E}">
+        <p14:creationId xmlns:p14="http://schemas.microsoft.com/office/powerpoint/2010/main" val="3284444153"/>
+      </p:ext>
+    </p:extLst>
+  </p:cSld>
+  <p:clrMapOvr>
+    <a:masterClrMapping/>
+  </p:clrMapOvr>
+</p:sld>
+</file>
+
+<file path=ppt/slides/slide6.xml><?xml version="1.0" encoding="utf-8"?>
+<p:sld xmlns:a="http://schemas.openxmlformats.org/drawingml/2006/main" xmlns:r="http://schemas.openxmlformats.org/officeDocument/2006/relationships" xmlns:p="http://schemas.openxmlformats.org/presentationml/2006/main">
+  <p:cSld>
+    <p:spTree>
+      <p:nvGrpSpPr>
+        <p:cNvPr id="1" name=""/>
+        <p:cNvGrpSpPr/>
+        <p:nvPr/>
+      </p:nvGrpSpPr>
+      <p:grpSpPr>
+        <a:xfrm>
+          <a:off x="0" y="0"/>
+          <a:ext cx="0" cy="0"/>
+          <a:chOff x="0" y="0"/>
+          <a:chExt cx="0" cy="0"/>
+        </a:xfrm>
+      </p:grpSpPr>
+      <p:sp>
+        <p:nvSpPr>
+          <p:cNvPr id="4" name="テキスト ボックス 3">
+            <a:extLst>
+              <a:ext uri="{FF2B5EF4-FFF2-40B4-BE49-F238E27FC236}">
+                <a16:creationId xmlns:a16="http://schemas.microsoft.com/office/drawing/2014/main" id="{5A13BF46-B8C5-48AA-8308-C9ECFF431A18}"/>
+              </a:ext>
+            </a:extLst>
+          </p:cNvPr>
+          <p:cNvSpPr txBox="1"/>
+          <p:nvPr/>
+        </p:nvSpPr>
+        <p:spPr>
+          <a:xfrm>
+            <a:off x="567542" y="491954"/>
+            <a:ext cx="2876108" cy="584775"/>
+          </a:xfrm>
+          <a:prstGeom prst="rect">
+            <a:avLst/>
+          </a:prstGeom>
+          <a:noFill/>
+        </p:spPr>
+        <p:txBody>
+          <a:bodyPr wrap="none" rtlCol="0">
+            <a:spAutoFit/>
+          </a:bodyPr>
+          <a:lstStyle/>
+          <a:p>
+            <a:r>
+              <a:rPr kumimoji="1" lang="en-US" altLang="ja-JP" sz="3200" b="1" u="sng" dirty="0"/>
+              <a:t>API</a:t>
+            </a:r>
+            <a:r>
+              <a:rPr kumimoji="1" lang="ja-JP" altLang="en-US" sz="3200" b="1" u="sng" dirty="0"/>
+              <a:t>と</a:t>
+            </a:r>
+            <a:r>
+              <a:rPr kumimoji="1" lang="en-US" altLang="ja-JP" sz="3200" b="1" u="sng" dirty="0"/>
+              <a:t>Handler</a:t>
+            </a:r>
+            <a:endParaRPr kumimoji="1" lang="ja-JP" altLang="en-US" sz="3200" b="1" u="sng" dirty="0"/>
+          </a:p>
+        </p:txBody>
+      </p:sp>
+      <p:sp>
+        <p:nvSpPr>
+          <p:cNvPr id="6" name="テキスト ボックス 5">
+            <a:extLst>
+              <a:ext uri="{FF2B5EF4-FFF2-40B4-BE49-F238E27FC236}">
+                <a16:creationId xmlns:a16="http://schemas.microsoft.com/office/drawing/2014/main" id="{55830AD6-028B-4C4E-80BF-B70DFC1C3A46}"/>
+              </a:ext>
+            </a:extLst>
+          </p:cNvPr>
+          <p:cNvSpPr txBox="1"/>
+          <p:nvPr/>
+        </p:nvSpPr>
+        <p:spPr>
+          <a:xfrm>
+            <a:off x="567542" y="1216429"/>
+            <a:ext cx="9440405" cy="461665"/>
+          </a:xfrm>
+          <a:prstGeom prst="rect">
+            <a:avLst/>
+          </a:prstGeom>
+          <a:noFill/>
+        </p:spPr>
+        <p:txBody>
+          <a:bodyPr wrap="none" rtlCol="0">
+            <a:spAutoFit/>
+          </a:bodyPr>
+          <a:lstStyle/>
+          <a:p>
+            <a:r>
+              <a:rPr lang="ja-JP" altLang="en-US" sz="2400" b="1" dirty="0">
+                <a:solidFill>
+                  <a:srgbClr val="00B050"/>
+                </a:solidFill>
+              </a:rPr>
+              <a:t>サーバープロジェクト</a:t>
+            </a:r>
+            <a:r>
+              <a:rPr lang="ja-JP" altLang="en-US" sz="2400" dirty="0"/>
+              <a:t>にある</a:t>
+            </a:r>
+            <a:r>
+              <a:rPr lang="en-US" altLang="ja-JP" sz="2400" b="1" dirty="0">
+                <a:solidFill>
+                  <a:srgbClr val="FF0000"/>
+                </a:solidFill>
+              </a:rPr>
+              <a:t>ServerHandler.cpp</a:t>
+            </a:r>
+            <a:r>
+              <a:rPr lang="ja-JP" altLang="en-US" sz="2400" dirty="0"/>
+              <a:t>を開きましょう。</a:t>
+            </a:r>
+            <a:endParaRPr lang="en-US" altLang="ja-JP" sz="2400" dirty="0"/>
+          </a:p>
+        </p:txBody>
+      </p:sp>
+      <p:pic>
+        <p:nvPicPr>
+          <p:cNvPr id="5" name="図 4">
+            <a:extLst>
+              <a:ext uri="{FF2B5EF4-FFF2-40B4-BE49-F238E27FC236}">
+                <a16:creationId xmlns:a16="http://schemas.microsoft.com/office/drawing/2014/main" id="{B8315E14-398E-4C20-B176-83CE30A92734}"/>
+              </a:ext>
+            </a:extLst>
+          </p:cNvPr>
+          <p:cNvPicPr>
+            <a:picLocks noChangeAspect="1"/>
+          </p:cNvPicPr>
+          <p:nvPr/>
+        </p:nvPicPr>
+        <p:blipFill>
+          <a:blip r:embed="rId2"/>
+          <a:stretch>
+            <a:fillRect/>
+          </a:stretch>
+        </p:blipFill>
+        <p:spPr>
+          <a:xfrm>
+            <a:off x="567542" y="1817794"/>
+            <a:ext cx="8195732" cy="4405206"/>
+          </a:xfrm>
+          <a:prstGeom prst="rect">
+            <a:avLst/>
+          </a:prstGeom>
+        </p:spPr>
+      </p:pic>
+    </p:spTree>
+    <p:extLst>
+      <p:ext uri="{BB962C8B-B14F-4D97-AF65-F5344CB8AC3E}">
+        <p14:creationId xmlns:p14="http://schemas.microsoft.com/office/powerpoint/2010/main" val="562811162"/>
+      </p:ext>
+    </p:extLst>
+  </p:cSld>
+  <p:clrMapOvr>
+    <a:masterClrMapping/>
+  </p:clrMapOvr>
+</p:sld>
+</file>
+
+<file path=ppt/slides/slide7.xml><?xml version="1.0" encoding="utf-8"?>
+<p:sld xmlns:a="http://schemas.openxmlformats.org/drawingml/2006/main" xmlns:r="http://schemas.openxmlformats.org/officeDocument/2006/relationships" xmlns:p="http://schemas.openxmlformats.org/presentationml/2006/main">
+  <p:cSld>
+    <p:spTree>
+      <p:nvGrpSpPr>
+        <p:cNvPr id="1" name=""/>
+        <p:cNvGrpSpPr/>
+        <p:nvPr/>
+      </p:nvGrpSpPr>
+      <p:grpSpPr>
+        <a:xfrm>
+          <a:off x="0" y="0"/>
+          <a:ext cx="0" cy="0"/>
+          <a:chOff x="0" y="0"/>
+          <a:chExt cx="0" cy="0"/>
+        </a:xfrm>
+      </p:grpSpPr>
+      <p:sp>
+        <p:nvSpPr>
+          <p:cNvPr id="4" name="テキスト ボックス 3">
+            <a:extLst>
+              <a:ext uri="{FF2B5EF4-FFF2-40B4-BE49-F238E27FC236}">
+                <a16:creationId xmlns:a16="http://schemas.microsoft.com/office/drawing/2014/main" id="{5A13BF46-B8C5-48AA-8308-C9ECFF431A18}"/>
+              </a:ext>
+            </a:extLst>
+          </p:cNvPr>
+          <p:cNvSpPr txBox="1"/>
+          <p:nvPr/>
+        </p:nvSpPr>
+        <p:spPr>
+          <a:xfrm>
+            <a:off x="567542" y="491954"/>
+            <a:ext cx="2876108" cy="584775"/>
+          </a:xfrm>
+          <a:prstGeom prst="rect">
+            <a:avLst/>
+          </a:prstGeom>
+          <a:noFill/>
+        </p:spPr>
+        <p:txBody>
+          <a:bodyPr wrap="none" rtlCol="0">
+            <a:spAutoFit/>
+          </a:bodyPr>
+          <a:lstStyle/>
+          <a:p>
+            <a:r>
+              <a:rPr kumimoji="1" lang="en-US" altLang="ja-JP" sz="3200" b="1" u="sng" dirty="0"/>
+              <a:t>API</a:t>
+            </a:r>
+            <a:r>
+              <a:rPr kumimoji="1" lang="ja-JP" altLang="en-US" sz="3200" b="1" u="sng" dirty="0"/>
+              <a:t>と</a:t>
+            </a:r>
+            <a:r>
+              <a:rPr kumimoji="1" lang="en-US" altLang="ja-JP" sz="3200" b="1" u="sng" dirty="0"/>
+              <a:t>Handler</a:t>
+            </a:r>
+            <a:endParaRPr kumimoji="1" lang="ja-JP" altLang="en-US" sz="3200" b="1" u="sng" dirty="0"/>
+          </a:p>
+        </p:txBody>
+      </p:sp>
+      <p:sp>
+        <p:nvSpPr>
+          <p:cNvPr id="6" name="テキスト ボックス 5">
+            <a:extLst>
+              <a:ext uri="{FF2B5EF4-FFF2-40B4-BE49-F238E27FC236}">
+                <a16:creationId xmlns:a16="http://schemas.microsoft.com/office/drawing/2014/main" id="{55830AD6-028B-4C4E-80BF-B70DFC1C3A46}"/>
+              </a:ext>
+            </a:extLst>
+          </p:cNvPr>
+          <p:cNvSpPr txBox="1"/>
+          <p:nvPr/>
+        </p:nvSpPr>
+        <p:spPr>
+          <a:xfrm>
+            <a:off x="567542" y="1216429"/>
+            <a:ext cx="8494633" cy="461665"/>
+          </a:xfrm>
+          <a:prstGeom prst="rect">
+            <a:avLst/>
+          </a:prstGeom>
+          <a:noFill/>
+        </p:spPr>
+        <p:txBody>
+          <a:bodyPr wrap="none" rtlCol="0">
+            <a:spAutoFit/>
+          </a:bodyPr>
+          <a:lstStyle/>
+          <a:p>
+            <a:r>
+              <a:rPr lang="ja-JP" altLang="en-US" sz="2400" dirty="0"/>
+              <a:t>いずれの関数も、</a:t>
+            </a:r>
+            <a:r>
+              <a:rPr lang="ja-JP" altLang="en-US" sz="2400" b="1" dirty="0">
+                <a:solidFill>
+                  <a:srgbClr val="FF0000"/>
+                </a:solidFill>
+              </a:rPr>
+              <a:t>データ受信→応答</a:t>
+            </a:r>
+            <a:r>
+              <a:rPr lang="ja-JP" altLang="en-US" sz="2400" dirty="0"/>
+              <a:t>の処理となっています。</a:t>
+            </a:r>
+            <a:endParaRPr lang="en-US" altLang="ja-JP" sz="2400" dirty="0"/>
+          </a:p>
+        </p:txBody>
+      </p:sp>
+      <p:pic>
+        <p:nvPicPr>
+          <p:cNvPr id="3" name="図 2">
+            <a:extLst>
+              <a:ext uri="{FF2B5EF4-FFF2-40B4-BE49-F238E27FC236}">
+                <a16:creationId xmlns:a16="http://schemas.microsoft.com/office/drawing/2014/main" id="{6464645A-090B-4FC1-A780-770A97F81780}"/>
+              </a:ext>
+            </a:extLst>
+          </p:cNvPr>
+          <p:cNvPicPr>
+            <a:picLocks noChangeAspect="1"/>
+          </p:cNvPicPr>
+          <p:nvPr/>
+        </p:nvPicPr>
+        <p:blipFill>
+          <a:blip r:embed="rId2"/>
+          <a:stretch>
+            <a:fillRect/>
+          </a:stretch>
+        </p:blipFill>
+        <p:spPr>
+          <a:xfrm>
+            <a:off x="567542" y="1817794"/>
+            <a:ext cx="8824561" cy="4548252"/>
+          </a:xfrm>
+          <a:prstGeom prst="rect">
+            <a:avLst/>
+          </a:prstGeom>
+        </p:spPr>
+      </p:pic>
+    </p:spTree>
+    <p:extLst>
+      <p:ext uri="{BB962C8B-B14F-4D97-AF65-F5344CB8AC3E}">
+        <p14:creationId xmlns:p14="http://schemas.microsoft.com/office/powerpoint/2010/main" val="3418357166"/>
+      </p:ext>
+    </p:extLst>
+  </p:cSld>
+  <p:clrMapOvr>
+    <a:masterClrMapping/>
+  </p:clrMapOvr>
+</p:sld>
+</file>
+
+<file path=ppt/slides/slide8.xml><?xml version="1.0" encoding="utf-8"?>
+<p:sld xmlns:a="http://schemas.openxmlformats.org/drawingml/2006/main" xmlns:r="http://schemas.openxmlformats.org/officeDocument/2006/relationships" xmlns:p="http://schemas.openxmlformats.org/presentationml/2006/main">
+  <p:cSld>
+    <p:spTree>
+      <p:nvGrpSpPr>
+        <p:cNvPr id="1" name=""/>
+        <p:cNvGrpSpPr/>
+        <p:nvPr/>
+      </p:nvGrpSpPr>
+      <p:grpSpPr>
+        <a:xfrm>
+          <a:off x="0" y="0"/>
+          <a:ext cx="0" cy="0"/>
+          <a:chOff x="0" y="0"/>
+          <a:chExt cx="0" cy="0"/>
+        </a:xfrm>
+      </p:grpSpPr>
+      <p:sp>
+        <p:nvSpPr>
+          <p:cNvPr id="4" name="テキスト ボックス 3">
+            <a:extLst>
+              <a:ext uri="{FF2B5EF4-FFF2-40B4-BE49-F238E27FC236}">
+                <a16:creationId xmlns:a16="http://schemas.microsoft.com/office/drawing/2014/main" id="{5A13BF46-B8C5-48AA-8308-C9ECFF431A18}"/>
+              </a:ext>
+            </a:extLst>
+          </p:cNvPr>
+          <p:cNvSpPr txBox="1"/>
+          <p:nvPr/>
+        </p:nvSpPr>
+        <p:spPr>
+          <a:xfrm>
+            <a:off x="567542" y="491954"/>
+            <a:ext cx="2876108" cy="584775"/>
+          </a:xfrm>
+          <a:prstGeom prst="rect">
+            <a:avLst/>
+          </a:prstGeom>
+          <a:noFill/>
+        </p:spPr>
+        <p:txBody>
+          <a:bodyPr wrap="none" rtlCol="0">
+            <a:spAutoFit/>
+          </a:bodyPr>
+          <a:lstStyle/>
+          <a:p>
+            <a:r>
+              <a:rPr kumimoji="1" lang="en-US" altLang="ja-JP" sz="3200" b="1" u="sng" dirty="0"/>
+              <a:t>API</a:t>
+            </a:r>
+            <a:r>
+              <a:rPr kumimoji="1" lang="ja-JP" altLang="en-US" sz="3200" b="1" u="sng" dirty="0"/>
+              <a:t>と</a:t>
+            </a:r>
+            <a:r>
+              <a:rPr kumimoji="1" lang="en-US" altLang="ja-JP" sz="3200" b="1" u="sng" dirty="0"/>
+              <a:t>Handler</a:t>
+            </a:r>
+            <a:endParaRPr kumimoji="1" lang="ja-JP" altLang="en-US" sz="3200" b="1" u="sng" dirty="0"/>
+          </a:p>
+        </p:txBody>
+      </p:sp>
+      <p:sp>
+        <p:nvSpPr>
+          <p:cNvPr id="6" name="テキスト ボックス 5">
+            <a:extLst>
+              <a:ext uri="{FF2B5EF4-FFF2-40B4-BE49-F238E27FC236}">
+                <a16:creationId xmlns:a16="http://schemas.microsoft.com/office/drawing/2014/main" id="{55830AD6-028B-4C4E-80BF-B70DFC1C3A46}"/>
+              </a:ext>
+            </a:extLst>
+          </p:cNvPr>
+          <p:cNvSpPr txBox="1"/>
+          <p:nvPr/>
+        </p:nvSpPr>
+        <p:spPr>
+          <a:xfrm>
+            <a:off x="567542" y="1216429"/>
+            <a:ext cx="7252306" cy="461665"/>
+          </a:xfrm>
+          <a:prstGeom prst="rect">
+            <a:avLst/>
+          </a:prstGeom>
+          <a:noFill/>
+        </p:spPr>
+        <p:txBody>
+          <a:bodyPr wrap="none" rtlCol="0">
+            <a:spAutoFit/>
+          </a:bodyPr>
+          <a:lstStyle/>
+          <a:p>
+            <a:r>
+              <a:rPr lang="en-US" altLang="ja-JP" sz="2400" b="1" dirty="0">
+                <a:solidFill>
+                  <a:srgbClr val="00B050"/>
+                </a:solidFill>
+              </a:rPr>
+              <a:t>Server</a:t>
+            </a:r>
+            <a:r>
+              <a:rPr lang="ja-JP" altLang="en-US" sz="2400" b="1" dirty="0">
+                <a:solidFill>
+                  <a:srgbClr val="00B050"/>
+                </a:solidFill>
+              </a:rPr>
+              <a:t>クラス</a:t>
+            </a:r>
+            <a:r>
+              <a:rPr lang="ja-JP" altLang="en-US" sz="2400" dirty="0"/>
+              <a:t>からこれらの関数が呼び出されます。</a:t>
+            </a:r>
+            <a:endParaRPr lang="en-US" altLang="ja-JP" sz="2400" dirty="0"/>
+          </a:p>
+        </p:txBody>
+      </p:sp>
+      <p:pic>
+        <p:nvPicPr>
+          <p:cNvPr id="5" name="図 4">
+            <a:extLst>
+              <a:ext uri="{FF2B5EF4-FFF2-40B4-BE49-F238E27FC236}">
+                <a16:creationId xmlns:a16="http://schemas.microsoft.com/office/drawing/2014/main" id="{1386D38A-0F97-4F1E-B2DF-76335991EBC5}"/>
+              </a:ext>
+            </a:extLst>
+          </p:cNvPr>
+          <p:cNvPicPr>
+            <a:picLocks noChangeAspect="1"/>
+          </p:cNvPicPr>
+          <p:nvPr/>
+        </p:nvPicPr>
+        <p:blipFill>
+          <a:blip r:embed="rId2"/>
+          <a:stretch>
+            <a:fillRect/>
+          </a:stretch>
+        </p:blipFill>
+        <p:spPr>
+          <a:xfrm>
+            <a:off x="567542" y="1817795"/>
+            <a:ext cx="9922118" cy="4548252"/>
+          </a:xfrm>
+          <a:prstGeom prst="rect">
+            <a:avLst/>
+          </a:prstGeom>
+        </p:spPr>
+      </p:pic>
+      <p:sp>
+        <p:nvSpPr>
+          <p:cNvPr id="7" name="正方形/長方形 6">
+            <a:extLst>
+              <a:ext uri="{FF2B5EF4-FFF2-40B4-BE49-F238E27FC236}">
+                <a16:creationId xmlns:a16="http://schemas.microsoft.com/office/drawing/2014/main" id="{5621CB1D-0337-4C14-B99A-875A860CD2D5}"/>
+              </a:ext>
+            </a:extLst>
+          </p:cNvPr>
+          <p:cNvSpPr/>
+          <p:nvPr/>
+        </p:nvSpPr>
+        <p:spPr>
+          <a:xfrm>
+            <a:off x="2201333" y="4576232"/>
+            <a:ext cx="8712199" cy="1392768"/>
+          </a:xfrm>
+          <a:prstGeom prst="rect">
+            <a:avLst/>
+          </a:prstGeom>
+          <a:noFill/>
+          <a:ln w="38100">
+            <a:solidFill>
+              <a:srgbClr val="FF0000"/>
+            </a:solidFill>
+          </a:ln>
+        </p:spPr>
+        <p:style>
+          <a:lnRef idx="2">
+            <a:schemeClr val="accent1">
+              <a:shade val="50000"/>
+            </a:schemeClr>
+          </a:lnRef>
+          <a:fillRef idx="1">
+            <a:schemeClr val="accent1"/>
+          </a:fillRef>
+          <a:effectRef idx="0">
+            <a:schemeClr val="accent1"/>
+          </a:effectRef>
+          <a:fontRef idx="minor">
+            <a:schemeClr val="lt1"/>
+          </a:fontRef>
+        </p:style>
+        <p:txBody>
+          <a:bodyPr rtlCol="0" anchor="ctr"/>
+          <a:lstStyle/>
+          <a:p>
+            <a:pPr algn="ctr"/>
+            <a:endParaRPr kumimoji="1" lang="ja-JP" altLang="en-US"/>
+          </a:p>
+        </p:txBody>
+      </p:sp>
+      <p:sp>
+        <p:nvSpPr>
+          <p:cNvPr id="8" name="テキスト ボックス 7">
+            <a:extLst>
+              <a:ext uri="{FF2B5EF4-FFF2-40B4-BE49-F238E27FC236}">
+                <a16:creationId xmlns:a16="http://schemas.microsoft.com/office/drawing/2014/main" id="{BE3F7761-E054-4375-807F-7767CF466DB8}"/>
+              </a:ext>
+            </a:extLst>
+          </p:cNvPr>
+          <p:cNvSpPr txBox="1"/>
+          <p:nvPr/>
+        </p:nvSpPr>
+        <p:spPr>
+          <a:xfrm>
+            <a:off x="567542" y="6396335"/>
+            <a:ext cx="8384026" cy="461665"/>
+          </a:xfrm>
+          <a:prstGeom prst="rect">
+            <a:avLst/>
+          </a:prstGeom>
+          <a:noFill/>
+        </p:spPr>
+        <p:txBody>
+          <a:bodyPr wrap="none" rtlCol="0">
+            <a:spAutoFit/>
+          </a:bodyPr>
+          <a:lstStyle/>
+          <a:p>
+            <a:r>
+              <a:rPr lang="en-US" altLang="ja-JP" sz="2400" dirty="0"/>
+              <a:t>※</a:t>
+            </a:r>
+            <a:r>
+              <a:rPr lang="ja-JP" altLang="en-US" sz="2400" dirty="0"/>
+              <a:t>この処理自身も</a:t>
+            </a:r>
+            <a:r>
+              <a:rPr lang="en-US" altLang="ja-JP" sz="2400" dirty="0"/>
+              <a:t>Handler</a:t>
+            </a:r>
+            <a:r>
+              <a:rPr lang="ja-JP" altLang="en-US" sz="2400" dirty="0"/>
+              <a:t>に持っていっても良いかもです。</a:t>
+            </a:r>
+            <a:endParaRPr lang="en-US" altLang="ja-JP" sz="2400" dirty="0"/>
+          </a:p>
+        </p:txBody>
+      </p:sp>
+    </p:spTree>
+    <p:extLst>
+      <p:ext uri="{BB962C8B-B14F-4D97-AF65-F5344CB8AC3E}">
+        <p14:creationId xmlns:p14="http://schemas.microsoft.com/office/powerpoint/2010/main" val="1573859773"/>
+      </p:ext>
+    </p:extLst>
+  </p:cSld>
+  <p:clrMapOvr>
+    <a:masterClrMapping/>
+  </p:clrMapOvr>
+</p:sld>
+</file>
+
+<file path=ppt/slides/slide9.xml><?xml version="1.0" encoding="utf-8"?>
+<p:sld xmlns:a="http://schemas.openxmlformats.org/drawingml/2006/main" xmlns:r="http://schemas.openxmlformats.org/officeDocument/2006/relationships" xmlns:p="http://schemas.openxmlformats.org/presentationml/2006/main">
+  <p:cSld>
+    <p:spTree>
+      <p:nvGrpSpPr>
+        <p:cNvPr id="1" name=""/>
+        <p:cNvGrpSpPr/>
+        <p:nvPr/>
+      </p:nvGrpSpPr>
+      <p:grpSpPr>
+        <a:xfrm>
+          <a:off x="0" y="0"/>
+          <a:ext cx="0" cy="0"/>
+          <a:chOff x="0" y="0"/>
+          <a:chExt cx="0" cy="0"/>
+        </a:xfrm>
+      </p:grpSpPr>
+      <p:sp>
+        <p:nvSpPr>
+          <p:cNvPr id="4" name="テキスト ボックス 3">
+            <a:extLst>
+              <a:ext uri="{FF2B5EF4-FFF2-40B4-BE49-F238E27FC236}">
+                <a16:creationId xmlns:a16="http://schemas.microsoft.com/office/drawing/2014/main" id="{5A13BF46-B8C5-48AA-8308-C9ECFF431A18}"/>
+              </a:ext>
+            </a:extLst>
+          </p:cNvPr>
+          <p:cNvSpPr txBox="1"/>
+          <p:nvPr/>
+        </p:nvSpPr>
+        <p:spPr>
+          <a:xfrm>
+            <a:off x="567542" y="491954"/>
+            <a:ext cx="2876108" cy="584775"/>
+          </a:xfrm>
+          <a:prstGeom prst="rect">
+            <a:avLst/>
+          </a:prstGeom>
+          <a:noFill/>
+        </p:spPr>
+        <p:txBody>
+          <a:bodyPr wrap="none" rtlCol="0">
+            <a:spAutoFit/>
+          </a:bodyPr>
+          <a:lstStyle/>
+          <a:p>
+            <a:r>
+              <a:rPr kumimoji="1" lang="en-US" altLang="ja-JP" sz="3200" b="1" u="sng" dirty="0"/>
+              <a:t>API</a:t>
+            </a:r>
+            <a:r>
+              <a:rPr kumimoji="1" lang="ja-JP" altLang="en-US" sz="3200" b="1" u="sng" dirty="0"/>
+              <a:t>と</a:t>
+            </a:r>
+            <a:r>
+              <a:rPr kumimoji="1" lang="en-US" altLang="ja-JP" sz="3200" b="1" u="sng" dirty="0"/>
+              <a:t>Handler</a:t>
+            </a:r>
+            <a:endParaRPr kumimoji="1" lang="ja-JP" altLang="en-US" sz="3200" b="1" u="sng" dirty="0"/>
+          </a:p>
+        </p:txBody>
+      </p:sp>
+      <p:sp>
+        <p:nvSpPr>
+          <p:cNvPr id="6" name="テキスト ボックス 5">
+            <a:extLst>
+              <a:ext uri="{FF2B5EF4-FFF2-40B4-BE49-F238E27FC236}">
+                <a16:creationId xmlns:a16="http://schemas.microsoft.com/office/drawing/2014/main" id="{55830AD6-028B-4C4E-80BF-B70DFC1C3A46}"/>
+              </a:ext>
+            </a:extLst>
+          </p:cNvPr>
+          <p:cNvSpPr txBox="1"/>
+          <p:nvPr/>
+        </p:nvSpPr>
+        <p:spPr>
+          <a:xfrm>
+            <a:off x="567542" y="1216429"/>
+            <a:ext cx="10416634" cy="2308324"/>
+          </a:xfrm>
+          <a:prstGeom prst="rect">
+            <a:avLst/>
+          </a:prstGeom>
+          <a:noFill/>
+        </p:spPr>
+        <p:txBody>
+          <a:bodyPr wrap="none" rtlCol="0">
+            <a:spAutoFit/>
+          </a:bodyPr>
+          <a:lstStyle/>
+          <a:p>
+            <a:r>
+              <a:rPr lang="ja-JP" altLang="en-US" sz="2400" dirty="0"/>
+              <a:t>一般的なプロジェクトでは、</a:t>
+            </a:r>
+            <a:endParaRPr lang="en-US" altLang="ja-JP" sz="2400" dirty="0"/>
+          </a:p>
+          <a:p>
+            <a:r>
+              <a:rPr lang="ja-JP" altLang="en-US" sz="2400" dirty="0"/>
+              <a:t>このような</a:t>
+            </a:r>
+            <a:r>
+              <a:rPr lang="en-US" altLang="ja-JP" sz="2400" dirty="0"/>
+              <a:t>API</a:t>
+            </a:r>
+            <a:r>
+              <a:rPr lang="ja-JP" altLang="en-US" sz="2400" dirty="0"/>
+              <a:t>や</a:t>
+            </a:r>
+            <a:r>
+              <a:rPr lang="en-US" altLang="ja-JP" sz="2400" dirty="0"/>
+              <a:t>Handler</a:t>
+            </a:r>
+            <a:r>
+              <a:rPr lang="ja-JP" altLang="en-US" sz="2400" dirty="0"/>
+              <a:t>を専門知識があるプログラマーが作成します。</a:t>
+            </a:r>
+            <a:endParaRPr lang="en-US" altLang="ja-JP" sz="2400" dirty="0"/>
+          </a:p>
+          <a:p>
+            <a:r>
+              <a:rPr lang="ja-JP" altLang="en-US" sz="2400" dirty="0"/>
+              <a:t>作ってくれた関数をほかのみんなが使っていくことになります。</a:t>
+            </a:r>
+            <a:endParaRPr lang="en-US" altLang="ja-JP" sz="2400" dirty="0"/>
+          </a:p>
+          <a:p>
+            <a:endParaRPr lang="en-US" altLang="ja-JP" sz="2400" dirty="0"/>
+          </a:p>
+          <a:p>
+            <a:r>
+              <a:rPr lang="ja-JP" altLang="en-US" sz="2400" dirty="0"/>
+              <a:t>もし、この授業でネットワークプログラミングに興味を持ったら、</a:t>
+            </a:r>
+            <a:endParaRPr lang="en-US" altLang="ja-JP" sz="2400" dirty="0"/>
+          </a:p>
+          <a:p>
+            <a:r>
+              <a:rPr lang="en-US" altLang="ja-JP" sz="2400" dirty="0"/>
+              <a:t>API</a:t>
+            </a:r>
+            <a:r>
+              <a:rPr lang="ja-JP" altLang="en-US" sz="2400" dirty="0"/>
+              <a:t>や</a:t>
+            </a:r>
+            <a:r>
+              <a:rPr lang="en-US" altLang="ja-JP" sz="2400" dirty="0"/>
+              <a:t>Handler</a:t>
+            </a:r>
+            <a:r>
+              <a:rPr lang="ja-JP" altLang="en-US" sz="2400" dirty="0"/>
+              <a:t>を作成するポジションを狙ってみても良いかもしれません。</a:t>
+            </a:r>
+            <a:endParaRPr lang="en-US" altLang="ja-JP" sz="2400" dirty="0"/>
+          </a:p>
+        </p:txBody>
+      </p:sp>
+    </p:spTree>
+    <p:extLst>
+      <p:ext uri="{BB962C8B-B14F-4D97-AF65-F5344CB8AC3E}">
+        <p14:creationId xmlns:p14="http://schemas.microsoft.com/office/powerpoint/2010/main" val="2525490122"/>
       </p:ext>
     </p:extLst>
   </p:cSld>

--- a/ゲーム科3年/00_前期/オンラインゲームプログラミングⅠ/12_APIとHandler.pptx
+++ b/ゲーム科3年/00_前期/オンラインゲームプログラミングⅠ/12_APIとHandler.pptx
@@ -267,7 +267,7 @@
           <a:p>
             <a:fld id="{E9CC885B-4903-4D54-9A93-00025F12DED9}" type="datetimeFigureOut">
               <a:rPr kumimoji="1" lang="ja-JP" altLang="en-US" smtClean="0"/>
-              <a:t>2026/1/19</a:t>
+              <a:t>2026/5/25</a:t>
             </a:fld>
             <a:endParaRPr kumimoji="1" lang="ja-JP" altLang="en-US"/>
           </a:p>
@@ -497,7 +497,7 @@
           <a:p>
             <a:fld id="{E9CC885B-4903-4D54-9A93-00025F12DED9}" type="datetimeFigureOut">
               <a:rPr kumimoji="1" lang="ja-JP" altLang="en-US" smtClean="0"/>
-              <a:t>2026/1/19</a:t>
+              <a:t>2026/5/25</a:t>
             </a:fld>
             <a:endParaRPr kumimoji="1" lang="ja-JP" altLang="en-US"/>
           </a:p>
@@ -737,7 +737,7 @@
           <a:p>
             <a:fld id="{E9CC885B-4903-4D54-9A93-00025F12DED9}" type="datetimeFigureOut">
               <a:rPr kumimoji="1" lang="ja-JP" altLang="en-US" smtClean="0"/>
-              <a:t>2026/1/19</a:t>
+              <a:t>2026/5/25</a:t>
             </a:fld>
             <a:endParaRPr kumimoji="1" lang="ja-JP" altLang="en-US"/>
           </a:p>
@@ -967,7 +967,7 @@
           <a:p>
             <a:fld id="{E9CC885B-4903-4D54-9A93-00025F12DED9}" type="datetimeFigureOut">
               <a:rPr kumimoji="1" lang="ja-JP" altLang="en-US" smtClean="0"/>
-              <a:t>2026/1/19</a:t>
+              <a:t>2026/5/25</a:t>
             </a:fld>
             <a:endParaRPr kumimoji="1" lang="ja-JP" altLang="en-US"/>
           </a:p>
@@ -1242,7 +1242,7 @@
           <a:p>
             <a:fld id="{E9CC885B-4903-4D54-9A93-00025F12DED9}" type="datetimeFigureOut">
               <a:rPr kumimoji="1" lang="ja-JP" altLang="en-US" smtClean="0"/>
-              <a:t>2026/1/19</a:t>
+              <a:t>2026/5/25</a:t>
             </a:fld>
             <a:endParaRPr kumimoji="1" lang="ja-JP" altLang="en-US"/>
           </a:p>
@@ -1571,7 +1571,7 @@
           <a:p>
             <a:fld id="{E9CC885B-4903-4D54-9A93-00025F12DED9}" type="datetimeFigureOut">
               <a:rPr kumimoji="1" lang="ja-JP" altLang="en-US" smtClean="0"/>
-              <a:t>2026/1/19</a:t>
+              <a:t>2026/5/25</a:t>
             </a:fld>
             <a:endParaRPr kumimoji="1" lang="ja-JP" altLang="en-US"/>
           </a:p>
@@ -2047,7 +2047,7 @@
           <a:p>
             <a:fld id="{E9CC885B-4903-4D54-9A93-00025F12DED9}" type="datetimeFigureOut">
               <a:rPr kumimoji="1" lang="ja-JP" altLang="en-US" smtClean="0"/>
-              <a:t>2026/1/19</a:t>
+              <a:t>2026/5/25</a:t>
             </a:fld>
             <a:endParaRPr kumimoji="1" lang="ja-JP" altLang="en-US"/>
           </a:p>
@@ -2188,7 +2188,7 @@
           <a:p>
             <a:fld id="{E9CC885B-4903-4D54-9A93-00025F12DED9}" type="datetimeFigureOut">
               <a:rPr kumimoji="1" lang="ja-JP" altLang="en-US" smtClean="0"/>
-              <a:t>2026/1/19</a:t>
+              <a:t>2026/5/25</a:t>
             </a:fld>
             <a:endParaRPr kumimoji="1" lang="ja-JP" altLang="en-US"/>
           </a:p>
@@ -2301,7 +2301,7 @@
           <a:p>
             <a:fld id="{E9CC885B-4903-4D54-9A93-00025F12DED9}" type="datetimeFigureOut">
               <a:rPr kumimoji="1" lang="ja-JP" altLang="en-US" smtClean="0"/>
-              <a:t>2026/1/19</a:t>
+              <a:t>2026/5/25</a:t>
             </a:fld>
             <a:endParaRPr kumimoji="1" lang="ja-JP" altLang="en-US"/>
           </a:p>
@@ -2644,7 +2644,7 @@
           <a:p>
             <a:fld id="{E9CC885B-4903-4D54-9A93-00025F12DED9}" type="datetimeFigureOut">
               <a:rPr kumimoji="1" lang="ja-JP" altLang="en-US" smtClean="0"/>
-              <a:t>2026/1/19</a:t>
+              <a:t>2026/5/25</a:t>
             </a:fld>
             <a:endParaRPr kumimoji="1" lang="ja-JP" altLang="en-US"/>
           </a:p>
@@ -2932,7 +2932,7 @@
           <a:p>
             <a:fld id="{E9CC885B-4903-4D54-9A93-00025F12DED9}" type="datetimeFigureOut">
               <a:rPr kumimoji="1" lang="ja-JP" altLang="en-US" smtClean="0"/>
-              <a:t>2026/1/19</a:t>
+              <a:t>2026/5/25</a:t>
             </a:fld>
             <a:endParaRPr kumimoji="1" lang="ja-JP" altLang="en-US"/>
           </a:p>
@@ -3205,7 +3205,7 @@
           <a:p>
             <a:fld id="{E9CC885B-4903-4D54-9A93-00025F12DED9}" type="datetimeFigureOut">
               <a:rPr kumimoji="1" lang="ja-JP" altLang="en-US" smtClean="0"/>
-              <a:t>2026/1/19</a:t>
+              <a:t>2026/5/25</a:t>
             </a:fld>
             <a:endParaRPr kumimoji="1" lang="ja-JP" altLang="en-US"/>
           </a:p>
@@ -5429,8 +5429,12 @@
               <a:t>Handler</a:t>
             </a:r>
             <a:r>
+              <a:rPr lang="ja-JP" altLang="en-US" sz="2400"/>
+              <a:t>を、専門</a:t>
+            </a:r>
+            <a:r>
               <a:rPr lang="ja-JP" altLang="en-US" sz="2400" dirty="0"/>
-              <a:t>を専門知識があるプログラマーが作成します。</a:t>
+              <a:t>知識があるプログラマーが作成します。</a:t>
             </a:r>
             <a:endParaRPr lang="en-US" altLang="ja-JP" sz="2400" dirty="0"/>
           </a:p>
